--- a/Lesson29-Capstone-OrchestrationAndUI/Lesson29-Capstone-OrchestrationAndUI.pptx
+++ b/Lesson29-Capstone-OrchestrationAndUI/Lesson29-Capstone-OrchestrationAndUI.pptx
@@ -10485,7 +10485,7 @@
                 <a:ea typeface="Courier New" pitchFamily="34" charset="-122"/>
                 <a:cs typeface="Courier New" pitchFamily="34" charset="-120"/>
               </a:rPr>
-              <a:t>Universal Project Manager (UPM) - Phase 3 Orchestration</a:t>
+              <a:t>Universal Project Manager (UPM) - Capstone I Orchestration</a:t>
             </a:r>
             <a:endParaRPr lang="en-US" sz="1050" dirty="0"/>
           </a:p>
